--- a/docs/perishable_markdown_tech_deck.pptx
+++ b/docs/perishable_markdown_tech_deck.pptx
@@ -207,16 +207,16 @@
                 <c:formatCode>General</c:formatCode>
                 <c:ptCount val="4"/>
                 <c:pt idx="0">
-                  <c:v>1.1441</c:v>
+                  <c:v>1.295</c:v>
                 </c:pt>
                 <c:pt idx="1">
-                  <c:v>0.9902</c:v>
+                  <c:v>1.117</c:v>
                 </c:pt>
                 <c:pt idx="2">
-                  <c:v>1.0952</c:v>
+                  <c:v>1.3116</c:v>
                 </c:pt>
                 <c:pt idx="3">
-                  <c:v>1.1196</c:v>
+                  <c:v>1.2714</c:v>
                 </c:pt>
               </c:numCache>
             </c:numRef>
@@ -297,7 +297,7 @@
         <c:axId val="2094734552"/>
         <c:scaling>
           <c:orientation val="minMax"/>
-          <c:max val="1.2"/>
+          <c:max val="1.4"/>
           <c:min val="0.9"/>
         </c:scaling>
         <c:delete val="0"/>
@@ -344,7 +344,7 @@
         <c:crossAx val="2094734554"/>
         <c:crosses val="autoZero"/>
         <c:crossBetween val="between"/>
-        <c:majorUnit val="0.05"/>
+        <c:majorUnit val="0.1"/>
       </c:valAx>
       <c:spPr>
         <a:noFill/>
@@ -853,7 +853,7 @@
           <a:p>
             <a:r>
               <a:rPr lang="en-US" dirty="0"/>
-              <a:t>The chart is the story: train-period fidelity ≠ launch-window fidelity. The gate initially 'failed' because it was being read across two demand regimes. Each finding was caught by a pre-committed gate, not by luck — that's the process working.</a:t>
+              <a:t>The chart shows the persistent level deficit (every window above 1) the calibration factor absorbs. The deeper finding is the weekly series: +-8 percent swings mean the original +-5 percent band was ~1 sigma — a coin flip. The owner reset it to ~2 sigma; the daily drift ratio in shadow/production is the real continuous guard. Each finding here was caught by a pre-committed gate or diagnostic, not by luck.</a:t>
             </a:r>
             <a:endParaRPr lang="en-US" dirty="0"/>
           </a:p>
@@ -2564,7 +2564,7 @@
                 <a:ea typeface="Calibri" pitchFamily="34" charset="-122"/>
                 <a:cs typeface="Calibri" pitchFamily="34" charset="-120"/>
               </a:rPr>
-              <a:t>Calibration gate PASSED  ·  1.0247</a:t>
+              <a:t>Gate band set from measured volatility  ·  [0.90, 1.10]</a:t>
             </a:r>
             <a:endParaRPr lang="en-US" sz="1500" dirty="0"/>
           </a:p>
@@ -3012,7 +3012,7 @@
                 <a:ea typeface="Calibri" pitchFamily="34" charset="-122"/>
                 <a:cs typeface="Calibri" pitchFamily="34" charset="-120"/>
               </a:rPr>
-              <a:t>Demand-model fidelity by time window · gate band 0.95–1.05, read on calib+test → PASS at 1.0247</a:t>
+              <a:t>Fidelity by window, current (v2) model, uncalibrated · weekly series: every week 1.06–1.54, σ ±8% · gate band [0.90, 1.10] (owner, ≈2σ) · calibrated re-gate in progress</a:t>
             </a:r>
             <a:endParaRPr lang="en-US" sz="1050" dirty="0"/>
           </a:p>
@@ -3095,7 +3095,7 @@
                 <a:ea typeface="Cambria" pitchFamily="34" charset="-122"/>
                 <a:cs typeface="Cambria" pitchFamily="34" charset="-120"/>
               </a:rPr>
-              <a:t>Regime drift, not model bias</a:t>
+              <a:t>Weekly volatility is a measured fact</a:t>
             </a:r>
             <a:endParaRPr lang="en-US" sz="1350" dirty="0"/>
           </a:p>
@@ -3134,7 +3134,7 @@
                 <a:ea typeface="Calibri" pitchFamily="34" charset="-122"/>
                 <a:cs typeface="Calibri" pitchFamily="34" charset="-120"/>
               </a:rPr>
-              <a:t>Whole-history fidelity (1.12) failed the gate — but the split shows a demand-level shift between spring and summer. Correction and evaluation now share the launch-adjacent regime; the gate passed without any correction factor.</a:t>
+              <a:t>The model under-predicts in every week of five months (mean ≈1.30, σ ±8%) — a persistent level deficit the calibration factor absorbs, plus week noise no frozen model can track. The gate band was reset by the owner to ≈2σ; the daily drift ratio is the continuous guard.</a:t>
             </a:r>
             <a:endParaRPr lang="en-US" sz="1050" dirty="0"/>
           </a:p>
@@ -3217,7 +3217,7 @@
                 <a:ea typeface="Cambria" pitchFamily="34" charset="-122"/>
                 <a:cs typeface="Cambria" pitchFamily="34" charset="-120"/>
               </a:rPr>
-              <a:t>Slope must not contaminate level</a:t>
+              <a:t>Survivorship confound found &amp; fixed</a:t>
             </a:r>
             <a:endParaRPr lang="en-US" sz="1350" dirty="0"/>
           </a:p>
@@ -3256,7 +3256,7 @@
                 <a:ea typeface="Calibri" pitchFamily="34" charset="-122"/>
                 <a:cs typeface="Calibri" pitchFamily="34" charset="-120"/>
               </a:rPr>
-              <a:t>An early correction basis let a wrong elasticity prior push level factors below 1 and made fidelity worse. Factors are now fit only at the reference anchor, where elasticity cancels by construction.</a:t>
+              <a:t>All 16 categories pinned at the zero elasticity boundary until identification was restricted to entry hours. One category (MEAT) now brackets cleanly; 14 fall back to an honest wide prior — by design.</a:t>
             </a:r>
             <a:endParaRPr lang="en-US" sz="1050" dirty="0"/>
           </a:p>
@@ -3339,7 +3339,7 @@
                 <a:ea typeface="Cambria" pitchFamily="34" charset="-122"/>
                 <a:cs typeface="Cambria" pitchFamily="34" charset="-120"/>
               </a:rPr>
-              <a:t>Survivorship confound found &amp; fixed</a:t>
+              <a:t>Per-SKU velocity features pay twice</a:t>
             </a:r>
             <a:endParaRPr lang="en-US" sz="1350" dirty="0"/>
           </a:p>
@@ -3378,7 +3378,7 @@
                 <a:ea typeface="Calibri" pitchFamily="34" charset="-122"/>
                 <a:cs typeface="Calibri" pitchFamily="34" charset="-120"/>
               </a:rPr>
-              <a:t>All 16 categories pinned at the zero boundary until identification was restricted to entry hours. One category (MEAT) now brackets cleanly; 14 fall back to an honest wide prior — by design.</a:t>
+              <a:t>Hourly MAE 0.405 → 0.373, and residual intra-episode correlation fell (deff 4.07 → 3.59) — every exploration outcome now carries ~12% more learning information.</a:t>
             </a:r>
             <a:endParaRPr lang="en-US" sz="1050" dirty="0"/>
           </a:p>
@@ -3566,7 +3566,7 @@
                 <a:ea typeface="Cambria" pitchFamily="34" charset="-122"/>
                 <a:cs typeface="Cambria" pitchFamily="34" charset="-120"/>
               </a:rPr>
-              <a:t>Measured on production data · 2026-08-08</a:t>
+              <a:t>Measured on production data · 2026-08-09</a:t>
             </a:r>
             <a:endParaRPr lang="en-US" sz="2900" dirty="0"/>
           </a:p>
@@ -3823,7 +3823,7 @@
                           <a:ea typeface="Calibri" pitchFamily="34" charset="-122"/>
                           <a:cs typeface="Calibri" pitchFamily="34" charset="-120"/>
                         </a:rPr>
-                        <a:t>Calibration gate (calib+test)</a:t>
+                        <a:t>Calibration gate</a:t>
                       </a:r>
                       <a:endParaRPr lang="en-US" sz="1150" dirty="0">
                         <a:latin typeface="Calibri" charset="0"/>
@@ -3888,7 +3888,7 @@
                           <a:ea typeface="Calibri" pitchFamily="34" charset="-122"/>
                           <a:cs typeface="Calibri" pitchFamily="34" charset="-120"/>
                         </a:rPr>
-                        <a:t>1.0247 — PASS</a:t>
+                        <a:t>band [0.90, 1.10] (owner, ≈2σ)</a:t>
                       </a:r>
                       <a:endParaRPr lang="en-US" sz="1150" dirty="0">
                         <a:latin typeface="Calibri" charset="0"/>
@@ -3953,7 +3953,7 @@
                           <a:ea typeface="Calibri" pitchFamily="34" charset="-122"/>
                           <a:cs typeface="Calibri" pitchFamily="34" charset="-120"/>
                         </a:rPr>
-                        <a:t>Frozen demand model is usable for the launch window (band 0.95–1.05)</a:t>
+                        <a:t>Calibrated re-run of the v2 model in progress; final retrain + re-fit at launch freeze</a:t>
                       </a:r>
                       <a:endParaRPr lang="en-US" sz="1150" dirty="0">
                         <a:latin typeface="Calibri" charset="0"/>
@@ -4282,7 +4282,7 @@
                           <a:ea typeface="Calibri" pitchFamily="34" charset="-122"/>
                           <a:cs typeface="Calibri" pitchFamily="34" charset="-120"/>
                         </a:rPr>
-                        <a:t>0.3772 / 9.134 / ≈ 4.07</a:t>
+                        <a:t>0.3183 / 9.134 / ≈ 3.59</a:t>
                       </a:r>
                       <a:endParaRPr lang="en-US" sz="1150" dirty="0">
                         <a:latin typeface="Calibri" charset="0"/>
@@ -4347,7 +4347,7 @@
                           <a:ea typeface="Calibri" pitchFamily="34" charset="-122"/>
                           <a:cs typeface="Calibri" pitchFamily="34" charset="-120"/>
                         </a:rPr>
-                        <a:t>Evidence deflation — convergence claims are honest</a:t>
+                        <a:t>Evidence deflation — down from 4.07 with the velocity features</a:t>
                       </a:r>
                       <a:endParaRPr lang="en-US" sz="1150" dirty="0">
                         <a:latin typeface="Calibri" charset="0"/>
@@ -4479,7 +4479,7 @@
                           <a:ea typeface="Calibri" pitchFamily="34" charset="-122"/>
                           <a:cs typeface="Calibri" pitchFamily="34" charset="-120"/>
                         </a:rPr>
-                        <a:t>₩202.8 · spend ₩1,271 vs budget ₩1,271 per day</a:t>
+                        <a:t>₩187–203 across runs · spend ≈ budget</a:t>
                       </a:r>
                       <a:endParaRPr lang="en-US" sz="1150" dirty="0">
                         <a:latin typeface="Calibri" charset="0"/>
@@ -4544,7 +4544,7 @@
                           <a:ea typeface="Calibri" pitchFamily="34" charset="-122"/>
                           <a:cs typeface="Calibri" pitchFamily="34" charset="-120"/>
                         </a:rPr>
-                        <a:t>Budget calibration lands on target</a:t>
+                        <a:t>Pasted into config only from a gate-passing report</a:t>
                       </a:r>
                       <a:endParaRPr lang="en-US" sz="1150" dirty="0">
                         <a:latin typeface="Calibri" charset="0"/>

--- a/docs/perishable_markdown_tech_deck.pptx
+++ b/docs/perishable_markdown_tech_deck.pptx
@@ -2564,7 +2564,7 @@
                 <a:ea typeface="Calibri" pitchFamily="34" charset="-122"/>
                 <a:cs typeface="Calibri" pitchFamily="34" charset="-120"/>
               </a:rPr>
-              <a:t>Gate band set from measured volatility  ·  [0.90, 1.10]</a:t>
+              <a:t>Gate: level-at-anchor · band [0.90, 1.10] from measured volatility</a:t>
             </a:r>
             <a:endParaRPr lang="en-US" sz="1500" dirty="0"/>
           </a:p>
@@ -3888,7 +3888,7 @@
                           <a:ea typeface="Calibri" pitchFamily="34" charset="-122"/>
                           <a:cs typeface="Calibri" pitchFamily="34" charset="-120"/>
                         </a:rPr>
-                        <a:t>band [0.90, 1.10] (owner, ≈2σ)</a:t>
+                        <a:t>level-at-anchor · band [0.90, 1.10]</a:t>
                       </a:r>
                       <a:endParaRPr lang="en-US" sz="1150" dirty="0">
                         <a:latin typeface="Calibri" charset="0"/>
@@ -3953,7 +3953,7 @@
                           <a:ea typeface="Calibri" pitchFamily="34" charset="-122"/>
                           <a:cs typeface="Calibri" pitchFamily="34" charset="-120"/>
                         </a:rPr>
-                        <a:t>Calibrated re-run of the v2 model in progress; final retrain + re-fit at launch freeze</a:t>
+                        <a:t>Gates the frozen artifact on its own job — the level at reference price; slope belongs to production learning (owner, 2026-08-09)</a:t>
                       </a:r>
                       <a:endParaRPr lang="en-US" sz="1150" dirty="0">
                         <a:latin typeface="Calibri" charset="0"/>

--- a/docs/perishable_markdown_tech_deck.pptx
+++ b/docs/perishable_markdown_tech_deck.pptx
@@ -2653,7 +2653,7 @@
                 <a:ea typeface="Calibri" pitchFamily="34" charset="-122"/>
                 <a:cs typeface="Calibri" pitchFamily="34" charset="-120"/>
               </a:rPr>
-              <a:t>Gate: level-at-anchor · band [0.90, 1.10] from measured volatility</a:t>
+              <a:t>Gate: level-at-anchor 1.0395 · band [0.90, 1.10] from measured volatility</a:t>
             </a:r>
             <a:endParaRPr lang="en-US" sz="1500" dirty="0"/>
           </a:p>
@@ -2736,7 +2736,7 @@
                 <a:ea typeface="Calibri" pitchFamily="34" charset="-122"/>
                 <a:cs typeface="Calibri" pitchFamily="34" charset="-120"/>
               </a:rPr>
-              <a:t>Shadow harness ready — no prices applied yet</a:t>
+              <a:t>Calibration and shadow gates PASSED — no prices applied yet</a:t>
             </a:r>
             <a:endParaRPr lang="en-US" sz="1500" dirty="0"/>
           </a:p>
@@ -2819,7 +2819,7 @@
                 <a:ea typeface="Calibri" pitchFamily="34" charset="-122"/>
                 <a:cs typeface="Calibri" pitchFamily="34" charset="-120"/>
               </a:rPr>
-              <a:t>23 automated tests · full pipeline on production data</a:t>
+              <a:t>25 automated tests · full pipeline on production data</a:t>
             </a:r>
             <a:endParaRPr lang="en-US" sz="1500" dirty="0"/>
           </a:p>
@@ -3777,7 +3777,7 @@
                 <a:ea typeface="Calibri" pitchFamily="34" charset="-122"/>
                 <a:cs typeface="Calibri" pitchFamily="34" charset="-120"/>
               </a:rPr>
-              <a:t>Fidelity by window, current (v2) model, uncalibrated · weekly series: every week 1.06–1.54, σ ±8% · gate band [0.90, 1.10] (owner, ≈2σ) · calibrated re-gate in progress</a:t>
+              <a:t>Fidelity by window, current (v2) model, uncalibrated · weekly series: every week 1.06–1.54, σ ±8% · gate band [0.90, 1.10] (owner, ≈2σ) · calibrated re-gate PASSED at 1.0395</a:t>
             </a:r>
             <a:endParaRPr lang="en-US" sz="1050" dirty="0"/>
           </a:p>
@@ -4653,7 +4653,7 @@
                           <a:ea typeface="Calibri" pitchFamily="34" charset="-122"/>
                           <a:cs typeface="Calibri" pitchFamily="34" charset="-120"/>
                         </a:rPr>
-                        <a:t>level-at-anchor · band [0.90, 1.10]</a:t>
+                        <a:t>PASS · 1.0395 in band [0.90, 1.10]</a:t>
                       </a:r>
                       <a:endParaRPr lang="en-US" sz="1150" dirty="0">
                         <a:latin typeface="Calibri" charset="0"/>
@@ -5244,7 +5244,7 @@
                           <a:ea typeface="Calibri" pitchFamily="34" charset="-122"/>
                           <a:cs typeface="Calibri" pitchFamily="34" charset="-120"/>
                         </a:rPr>
-                        <a:t>₩187–203 across runs · spend ≈ budget</a:t>
+                        <a:t>₩203.09 from the passing run · spend ≈ budget</a:t>
                       </a:r>
                       <a:endParaRPr lang="en-US" sz="1150" dirty="0">
                         <a:latin typeface="Calibri" charset="0"/>
@@ -5835,7 +5835,7 @@
                           <a:ea typeface="Calibri" pitchFamily="34" charset="-122"/>
                           <a:cs typeface="Calibri" pitchFamily="34" charset="-120"/>
                         </a:rPr>
-                        <a:t>like-for-like: both policies under the same demand model</a:t>
+                        <a:t>like-for-like DP vs legacy: −12.0% IL</a:t>
                       </a:r>
                       <a:endParaRPr lang="en-US" sz="1150" dirty="0">
                         <a:latin typeface="Calibri" charset="0"/>
@@ -5900,7 +5900,7 @@
                           <a:ea typeface="Calibri" pitchFamily="34" charset="-122"/>
                           <a:cs typeface="Calibri" pitchFamily="34" charset="-120"/>
                         </a:rPr>
-                        <a:t>Model bias cancels between arms; replay is sanity, never launch evidence — the A/B decides</a:t>
+                        <a:t>Both arms run through the same demand model, so model bias cancels; replay is sanity, never launch evidence — the A/B decides</a:t>
                       </a:r>
                       <a:endParaRPr lang="en-US" sz="1150" dirty="0">
                         <a:latin typeface="Calibri" charset="0"/>
@@ -6578,7 +6578,7 @@
                 <a:ea typeface="Calibri" pitchFamily="34" charset="-122"/>
                 <a:cs typeface="Calibri" pitchFamily="34" charset="-120"/>
               </a:rPr>
-              <a:t>Full decision path live; no prices applied; event pipeline proven</a:t>
+              <a:t>Full decision path live, no prices applied — completeness 1.0000, zero cost-floor violations</a:t>
             </a:r>
             <a:endParaRPr lang="en-US" sz="1100" dirty="0"/>
           </a:p>
@@ -6639,7 +6639,7 @@
                 <a:ea typeface="Calibri" pitchFamily="34" charset="-122"/>
                 <a:cs typeface="Calibri" pitchFamily="34" charset="-120"/>
               </a:rPr>
-              <a:t>READY</a:t>
+              <a:t>DONE</a:t>
             </a:r>
             <a:endParaRPr lang="en-US" sz="1000" dirty="0"/>
           </a:p>
@@ -6807,7 +6807,7 @@
                 <a:ea typeface="Calibri" pitchFamily="34" charset="-122"/>
                 <a:cs typeface="Calibri" pitchFamily="34" charset="-120"/>
               </a:rPr>
-              <a:t>PENDING</a:t>
+              <a:t>NEXT</a:t>
             </a:r>
             <a:endParaRPr lang="en-US" sz="1000" dirty="0"/>
           </a:p>
@@ -7182,7 +7182,7 @@
                 <a:ea typeface="Calibri" pitchFamily="34" charset="-122"/>
                 <a:cs typeface="Calibri" pitchFamily="34" charset="-120"/>
               </a:rPr>
-              <a:t>Shadow additionally produces the would-be exploration statistics that answer the learning-speed question — before any price is applied.</a:t>
+              <a:t>Shadow also produced the would-be exploration statistics that answer the learning-speed question — before any price was applied.</a:t>
             </a:r>
             <a:endParaRPr lang="en-US" sz="1200" dirty="0"/>
           </a:p>
@@ -8411,7 +8411,7 @@
                 <a:ea typeface="Calibri" pitchFamily="34" charset="-122"/>
                 <a:cs typeface="Calibri" pitchFamily="34" charset="-120"/>
               </a:rPr>
-              <a:t>A healthy system spending 1% of IL cannot move scrap near 20%; the failure it guards against breached the equivalent 5–10× in replay. Validated against the measured 3σ daily noise.</a:t>
+              <a:t>A healthy system spending 1% of IL cannot move scrap near 20%; the failure it guards against breached the equivalent 5–10× in replay. Measured 3σ daily noise is 9.1% — this sits ≈2.2× clear of it.</a:t>
             </a:r>
             <a:endParaRPr lang="en-US" sz="1050" dirty="0"/>
           </a:p>
@@ -8518,7 +8518,7 @@
                 <a:ea typeface="Cambria" pitchFamily="34" charset="-122"/>
                 <a:cs typeface="Cambria" pitchFamily="34" charset="-120"/>
               </a:rPr>
-              <a:t>10% relative + 2-day persistence</a:t>
+              <a:t>15% relative + 2-day persistence</a:t>
             </a:r>
             <a:endParaRPr lang="en-US" sz="1900" dirty="0"/>
           </a:p>
@@ -8557,7 +8557,7 @@
                 <a:ea typeface="Calibri" pitchFamily="34" charset="-122"/>
                 <a:cs typeface="Calibri" pitchFamily="34" charset="-120"/>
               </a:rPr>
-              <a:t>Markdown margins are thin, so daily noise is high — persistence, not a looser threshold, is the noise control. Both guardrails suspend exploration only; pricing continues.</a:t>
+              <a:t>Markdown margins are thin: measured 3σ daily noise is 13.4%, so anything at or under ~13% fires on ordinary days. Persistence, not a tighter number, is the noise control. Both guardrails suspend exploration only; pricing continues.</a:t>
             </a:r>
             <a:endParaRPr lang="en-US" sz="1050" dirty="0"/>
           </a:p>
@@ -8639,7 +8639,7 @@
                 <a:ea typeface="Calibri" pitchFamily="34" charset="-122"/>
                 <a:cs typeface="Calibri" pitchFamily="34" charset="-120"/>
               </a:rPr>
-              <a:t>set the three thresholds → run the shadow phase → read the learning-speed math from its output → final model retrain at freeze → exploit-only pilot.</a:t>
+              <a:t>set the three thresholds → read the learning-speed math from the shadow output → final model retrain at the launch freeze → exploit-only pilot.</a:t>
             </a:r>
             <a:endParaRPr lang="en-US" sz="1250" dirty="0"/>
           </a:p>
@@ -8932,7 +8932,7 @@
                 <a:ea typeface="Calibri" pitchFamily="34" charset="-122"/>
                 <a:cs typeface="Calibri" pitchFamily="34" charset="-120"/>
               </a:rPr>
-              <a:t>Repository — Kamalyunus/fresh-markdown (23 automated tests, full pipeline)</a:t>
+              <a:t>Repository — Kamalyunus/fresh-markdown (25 automated tests, full pipeline)</a:t>
             </a:r>
             <a:endParaRPr lang="en-US" sz="1350" dirty="0"/>
           </a:p>

--- a/docs/perishable_markdown_tech_deck.pptx
+++ b/docs/perishable_markdown_tech_deck.pptx
@@ -5835,7 +5835,7 @@
                           <a:ea typeface="Calibri" pitchFamily="34" charset="-122"/>
                           <a:cs typeface="Calibri" pitchFamily="34" charset="-120"/>
                         </a:rPr>
-                        <a:t>like-for-like DP vs legacy: −12.0% IL</a:t>
+                        <a:t>like-for-like DP vs legacy: −12.0% IL, −3.25pp clearance</a:t>
                       </a:r>
                       <a:endParaRPr lang="en-US" sz="1150" dirty="0">
                         <a:latin typeface="Calibri" charset="0"/>
@@ -5900,7 +5900,7 @@
                           <a:ea typeface="Calibri" pitchFamily="34" charset="-122"/>
                           <a:cs typeface="Calibri" pitchFamily="34" charset="-120"/>
                         </a:rPr>
-                        <a:t>Both arms run through the same demand model, so model bias cancels; replay is sanity, never launch evidence — the A/B decides</a:t>
+                        <a:t>Both arms run through the same demand model, so model bias cancels. The IL win is partly bought with scrap — the pilot reports clearance beside IL from day one. Replay is sanity, never launch evidence; the A/B decides</a:t>
                       </a:r>
                       <a:endParaRPr lang="en-US" sz="1150" dirty="0">
                         <a:latin typeface="Calibri" charset="0"/>
@@ -8226,7 +8226,7 @@
                 <a:ea typeface="Cambria" pitchFamily="34" charset="-122"/>
                 <a:cs typeface="Cambria" pitchFamily="34" charset="-120"/>
               </a:rPr>
-              <a:t>7.5% relative on IL%</a:t>
+              <a:t>7.5% relative on IL% · 2 weeks</a:t>
             </a:r>
             <a:endParaRPr lang="en-US" sz="1900" dirty="0"/>
           </a:p>
@@ -8265,7 +8265,7 @@
                 <a:ea typeface="Calibri" pitchFamily="34" charset="-122"/>
                 <a:cs typeface="Calibri" pitchFamily="34" charset="-120"/>
               </a:rPr>
-              <a:t>≈ 5-week experiment. A 5% target likely does not fit the MVP window; the derivation tool measures power empirically on real T-week slices of history — the owner picks the (effect, duration) pair.</a:t>
+              <a:t>Measured on real 2-week blocks of history: 5.54% detectable, so 7.5% has headroom and 5% is within reach. This overturns the earlier ≈5-week arithmetic. Rows beyond 6 weeks rest on 1–2 blocks and are noise — read the 2–4 week rows only.</a:t>
             </a:r>
             <a:endParaRPr lang="en-US" sz="1050" dirty="0"/>
           </a:p>
@@ -8411,7 +8411,7 @@
                 <a:ea typeface="Calibri" pitchFamily="34" charset="-122"/>
                 <a:cs typeface="Calibri" pitchFamily="34" charset="-120"/>
               </a:rPr>
-              <a:t>A healthy system spending 1% of IL cannot move scrap near 20%; the failure it guards against breached the equivalent 5–10× in replay. Measured 3σ daily noise is 9.1% — this sits ≈2.2× clear of it.</a:t>
+              <a:t>A healthy system spending 1% of IL cannot move scrap near 20%; the failure it guards against breached the equivalent 5–10× in replay. The raw 3σ noise measure came back outlier-dominated (a few low-volume days) — 20% is provisional pending the robust re-read.</a:t>
             </a:r>
             <a:endParaRPr lang="en-US" sz="1050" dirty="0"/>
           </a:p>
@@ -16867,7 +16867,7 @@
                 <a:ea typeface="Cambria" pitchFamily="34" charset="-122"/>
                 <a:cs typeface="Cambria" pitchFamily="34" charset="-120"/>
               </a:rPr>
-              <a:t>₩202.8</a:t>
+              <a:t>₩203.09</a:t>
             </a:r>
             <a:endParaRPr lang="en-US" sz="3800" dirty="0"/>
           </a:p>
@@ -16906,7 +16906,7 @@
                 <a:ea typeface="Calibri" pitchFamily="34" charset="-122"/>
                 <a:cs typeface="Calibri" pitchFamily="34" charset="-120"/>
               </a:rPr>
-              <a:t>starting threshold τ (27.5th percentile of the Q-value spread), self-calibrating daily</a:t>
+              <a:t>starting threshold τ (22.7th percentile of the Q-value spread), self-calibrating daily</a:t>
             </a:r>
             <a:endParaRPr lang="en-US" sz="1100" dirty="0"/>
           </a:p>

--- a/docs/perishable_markdown_tech_deck.pptx
+++ b/docs/perishable_markdown_tech_deck.pptx
@@ -3373,7 +3373,7 @@
                 <a:ea typeface="Cambria" pitchFamily="34" charset="-122"/>
                 <a:cs typeface="Cambria" pitchFamily="34" charset="-120"/>
               </a:rPr>
-              <a:t>Correlated hours are deflated ÷ 4.07</a:t>
+              <a:t>Correlated hours are deflated ÷ 3.589</a:t>
             </a:r>
             <a:endParaRPr lang="en-US" sz="1350" dirty="0"/>
           </a:p>
@@ -3412,7 +3412,7 @@
                 <a:ea typeface="Calibri" pitchFamily="34" charset="-122"/>
                 <a:cs typeface="Calibri" pitchFamily="34" charset="-120"/>
               </a:rPr>
-              <a:t>Hours in an episode share one inventory pool and one demand shock. Counted as independent, the system would declare convergence four times too early. deff = 1 + (forced hours − 1) × ρ — every input measured, not assumed.</a:t>
+              <a:t>Hours in an episode share one inventory pool and one demand shock. Counted as independent, the system would declare convergence three-and-a-half times too early. deff = 1 + (forced hours − 1) × ρ — every input fitted against the model's own residuals, and start-up refuses to run if config drifts from the frozen artifact.</a:t>
             </a:r>
             <a:endParaRPr lang="en-US" sz="1100" dirty="0"/>
           </a:p>
@@ -5047,7 +5047,7 @@
                           <a:ea typeface="Calibri" pitchFamily="34" charset="-122"/>
                           <a:cs typeface="Calibri" pitchFamily="34" charset="-120"/>
                         </a:rPr>
-                        <a:t>0.3183 / 9.134 / ≈ 3.59</a:t>
+                        <a:t>0.3183 / 9.134 / 3.589</a:t>
                       </a:r>
                       <a:endParaRPr lang="en-US" sz="1150" dirty="0">
                         <a:latin typeface="Calibri" charset="0"/>
@@ -15274,7 +15274,7 @@
                 <a:ea typeface="Calibri" pitchFamily="34" charset="-122"/>
                 <a:cs typeface="Calibri" pitchFamily="34" charset="-120"/>
               </a:rPr>
-              <a:t>Evidence ÷ deff ≈ 4.07</a:t>
+              <a:t>Evidence ÷ deff = 3.589</a:t>
             </a:r>
             <a:endParaRPr lang="en-US" sz="1100" dirty="0"/>
           </a:p>

--- a/docs/perishable_markdown_tech_deck.pptx
+++ b/docs/perishable_markdown_tech_deck.pptx
@@ -6578,7 +6578,7 @@
                 <a:ea typeface="Calibri" pitchFamily="34" charset="-122"/>
                 <a:cs typeface="Calibri" pitchFamily="34" charset="-120"/>
               </a:rPr>
-              <a:t>Full decision path live, no prices applied — completeness 1.0000, zero cost-floor violations</a:t>
+              <a:t>Full decision path live, no prices applied — completeness 1.0000, zero cost-floor violations, mean discount 0.306 vs legacy 0.304</a:t>
             </a:r>
             <a:endParaRPr lang="en-US" sz="1100" dirty="0"/>
           </a:p>
@@ -8411,7 +8411,7 @@
                 <a:ea typeface="Calibri" pitchFamily="34" charset="-122"/>
                 <a:cs typeface="Calibri" pitchFamily="34" charset="-120"/>
               </a:rPr>
-              <a:t>A healthy system spending 1% of IL cannot move scrap near 20%; the failure it guards against breached the equivalent 5–10× in replay. The raw 3σ noise measure came back outlier-dominated (a few low-volume days) — 20% is provisional pending the robust re-read.</a:t>
+              <a:t>A healthy system spending 1% of IL cannot move scrap near 20%; the failure it guards against breached the equivalent 5–10× in replay. Robust 3σ noise floor is 18.9%, so 20% clears it by only ~6% — the persistence rule is what makes that safe.</a:t>
             </a:r>
             <a:endParaRPr lang="en-US" sz="1050" dirty="0"/>
           </a:p>
@@ -8557,7 +8557,7 @@
                 <a:ea typeface="Calibri" pitchFamily="34" charset="-122"/>
                 <a:cs typeface="Calibri" pitchFamily="34" charset="-120"/>
               </a:rPr>
-              <a:t>Markdown margins are thin: measured 3σ daily noise is 13.4%, so anything at or under ~13% fires on ordinary days. Persistence, not a tighter number, is the noise control. Both guardrails suspend exploration only; pricing continues.</a:t>
+              <a:t>Markdown margins are thin: measured 3σ floor is 13.6%, so anything at or under ~13.5% fires on ordinary days. Both thresholds now sit close to their floors, which makes the 2-day persistence rule load-bearing — it is implemented and tested, not an aspiration. Guardrails suspend exploration only; pricing continues.</a:t>
             </a:r>
             <a:endParaRPr lang="en-US" sz="1050" dirty="0"/>
           </a:p>
@@ -9377,7 +9377,7 @@
                 <a:ea typeface="Cambria" pitchFamily="34" charset="-122"/>
                 <a:cs typeface="Cambria" pitchFamily="34" charset="-120"/>
               </a:rPr>
-              <a:t>34.6%</a:t>
+              <a:t>35.6%</a:t>
             </a:r>
             <a:endParaRPr lang="en-US" sz="3400" dirty="0"/>
           </a:p>
@@ -9416,7 +9416,7 @@
                 <a:ea typeface="Calibri" pitchFamily="34" charset="-122"/>
                 <a:cs typeface="Calibri" pitchFamily="34" charset="-120"/>
               </a:rPr>
-              <a:t>Inventory Loss as a share of full-price sales value (markdown cohort)</a:t>
+              <a:t>Inventory Loss as a share of full-price sales value — 356,114 episodes</a:t>
             </a:r>
             <a:endParaRPr lang="en-US" sz="1050" dirty="0"/>
           </a:p>

--- a/docs/perishable_markdown_tech_deck.pptx
+++ b/docs/perishable_markdown_tech_deck.pptx
@@ -4143,7 +4143,7 @@
                 <a:ea typeface="Calibri" pitchFamily="34" charset="-122"/>
                 <a:cs typeface="Calibri" pitchFamily="34" charset="-120"/>
               </a:rPr>
-              <a:t>Hourly MAE 0.405 → 0.373, and residual intra-episode correlation fell (deff 4.07 → 3.59) — every exploration outcome now carries ~12% more learning information.</a:t>
+              <a:t>Hourly MAE 0.405 → 0.373, and residual intra-episode correlation fell (deff 4.07 → 3.589) — every exploration outcome now carries ~13% more learning information.</a:t>
             </a:r>
             <a:endParaRPr lang="en-US" sz="1050" dirty="0"/>
           </a:p>
@@ -7491,7 +7491,7 @@
                 <a:ea typeface="Calibri" pitchFamily="34" charset="-122"/>
                 <a:cs typeface="Calibri" pitchFamily="34" charset="-120"/>
               </a:rPr>
-              <a:t>Per-outcome information is small and deflated ÷ 4.07; the prior is wide for 14/16 categories; monotonicity concentrates identification at episode entry.</a:t>
+              <a:t>Per-outcome information is small and deflated ÷ 3.589; the prior is wide for 14/16 categories. Deepening only pays once |ε| clears ~1.7–1.9, so the posterior must TRAVEL, not merely converge.</a:t>
             </a:r>
             <a:endParaRPr lang="en-US" sz="1050" dirty="0"/>
           </a:p>
@@ -7544,7 +7544,7 @@
                 <a:ea typeface="Calibri" pitchFamily="34" charset="-122"/>
                 <a:cs typeface="Calibri" pitchFamily="34" charset="-120"/>
               </a:rPr>
-              <a:t>Quantify weeks-to-convergence from shadow output BEFORE the learning pilot. Levers: concentrate budget on entry decisions, raise the budget share, coarser cells. A 21-day flat-posterior alert catches a dead loop.</a:t>
+              <a:t>Shadow now emits learning_yield_would_be, so weeks-to-convergence is read off before the pilot. Two floors bind separately: evidence, and calendar — the 0.15 step cap at one human-gated update per day means ≥6 days to move the mean 1.0 → 1.9 however fast evidence arrives.</a:t>
             </a:r>
             <a:endParaRPr lang="en-US" sz="1050" dirty="0"/>
           </a:p>
@@ -7931,7 +7931,7 @@
                 <a:ea typeface="Calibri" pitchFamily="34" charset="-122"/>
                 <a:cs typeface="Calibri" pitchFamily="34" charset="-120"/>
               </a:rPr>
-              <a:t>Also tracked: metric divergence at readout (pre-committed rule) · single-elasticity misspecification (residuals logged by discount region) · censored training labels (first phase-2 item).</a:t>
+              <a:t>Also tracked: day-one behaviour is enter-shallow-and-hold, so expect lower clearance and higher scrap until ε moves · metric divergence at readout (pre-committed rule) · single-elasticity misspecification · censored training labels (first phase-2 item).</a:t>
             </a:r>
             <a:endParaRPr lang="en-US" sz="1100" dirty="0"/>
           </a:p>
@@ -9246,7 +9246,7 @@
                 <a:ea typeface="Calibri" pitchFamily="34" charset="-122"/>
                 <a:cs typeface="Calibri" pitchFamily="34" charset="-120"/>
               </a:rPr>
-              <a:t>Every perishable SKU × fulfilment centre gets one final selling window per day — an “episode” of contiguous hours, typically 10:00–20:00, with a median starting inventory of just 2 units.</a:t>
+              <a:t>Every perishable SKU × fulfilment centre gets one final selling window — an “episode” of contiguous hours with a median starting inventory of just 2 units. Windows are not a trading day: they routinely run past midnight and 36-hour windows are common.</a:t>
             </a:r>
             <a:endParaRPr lang="en-US" sz="1400" dirty="0"/>
           </a:p>

--- a/docs/perishable_markdown_tech_deck.pptx
+++ b/docs/perishable_markdown_tech_deck.pptx
@@ -2653,7 +2653,7 @@
                 <a:ea typeface="Calibri" pitchFamily="34" charset="-122"/>
                 <a:cs typeface="Calibri" pitchFamily="34" charset="-120"/>
               </a:rPr>
-              <a:t>Gate: level-at-anchor 1.0395 · band [0.90, 1.10] from measured volatility</a:t>
+              <a:t>Gate: level-at-anchor 1.0389 · band [0.90, 1.10] from measured volatility</a:t>
             </a:r>
             <a:endParaRPr lang="en-US" sz="1500" dirty="0"/>
           </a:p>
@@ -3373,7 +3373,7 @@
                 <a:ea typeface="Cambria" pitchFamily="34" charset="-122"/>
                 <a:cs typeface="Cambria" pitchFamily="34" charset="-120"/>
               </a:rPr>
-              <a:t>Correlated hours are deflated ÷ 3.589</a:t>
+              <a:t>Correlated hours are deflated ÷ 3.347</a:t>
             </a:r>
             <a:endParaRPr lang="en-US" sz="1350" dirty="0"/>
           </a:p>
@@ -3777,7 +3777,7 @@
                 <a:ea typeface="Calibri" pitchFamily="34" charset="-122"/>
                 <a:cs typeface="Calibri" pitchFamily="34" charset="-120"/>
               </a:rPr>
-              <a:t>Fidelity by window, current (v2) model, uncalibrated · weekly series: every week 1.06–1.54, σ ±8% · gate band [0.90, 1.10] (owner, ≈2σ) · calibrated re-gate PASSED at 1.0395</a:t>
+              <a:t>Fidelity by window, current (v2) model, uncalibrated · weekly series: every week 1.06–1.54, σ ±8% · gate band [0.90, 1.10] (owner, ≈2σ) · calibrated re-gate PASSED at 1.0389</a:t>
             </a:r>
             <a:endParaRPr lang="en-US" sz="1050" dirty="0"/>
           </a:p>
@@ -4021,7 +4021,7 @@
                 <a:ea typeface="Calibri" pitchFamily="34" charset="-122"/>
                 <a:cs typeface="Calibri" pitchFamily="34" charset="-120"/>
               </a:rPr>
-              <a:t>All 16 categories pinned at the zero elasticity boundary until identification was restricted to entry hours. One category (MEAT) now brackets cleanly; 14 fall back to an honest wide prior — by design.</a:t>
+              <a:t>All 16 categories pinned at the zero elasticity boundary until identification was restricted to entry hours; the pinning stopped. None of the 16 clears the acceptance checks on the corrected extract, so every cell launches on the honest wide prior — the gate refusing to certify what the data cannot support.</a:t>
             </a:r>
             <a:endParaRPr lang="en-US" sz="1050" dirty="0"/>
           </a:p>
@@ -4143,7 +4143,7 @@
                 <a:ea typeface="Calibri" pitchFamily="34" charset="-122"/>
                 <a:cs typeface="Calibri" pitchFamily="34" charset="-120"/>
               </a:rPr>
-              <a:t>Hourly MAE 0.405 → 0.373, and residual intra-episode correlation fell (deff 4.07 → 3.589) — every exploration outcome now carries ~13% more learning information.</a:t>
+              <a:t>Hourly MAE 0.405 → 0.373, and residual intra-episode correlation fell (deff 4.07 → 3.347) — every exploration outcome now carries ~18% more learning information.</a:t>
             </a:r>
             <a:endParaRPr lang="en-US" sz="1050" dirty="0"/>
           </a:p>
@@ -4653,7 +4653,7 @@
                           <a:ea typeface="Calibri" pitchFamily="34" charset="-122"/>
                           <a:cs typeface="Calibri" pitchFamily="34" charset="-120"/>
                         </a:rPr>
-                        <a:t>PASS · 1.0395 in band [0.90, 1.10]</a:t>
+                        <a:t>PASS · 1.0389 in band [0.90, 1.10]</a:t>
                       </a:r>
                       <a:endParaRPr lang="en-US" sz="1150" dirty="0">
                         <a:latin typeface="Calibri" charset="0"/>
@@ -4850,7 +4850,7 @@
                           <a:ea typeface="Calibri" pitchFamily="34" charset="-122"/>
                           <a:cs typeface="Calibri" pitchFamily="34" charset="-120"/>
                         </a:rPr>
-                        <a:t>34.64%  (₩14.7M / 2,000 episodes)</a:t>
+                        <a:t>32.27%  (₩14.27M / 2,000 episodes)</a:t>
                       </a:r>
                       <a:endParaRPr lang="en-US" sz="1150" dirty="0">
                         <a:latin typeface="Calibri" charset="0"/>
@@ -5047,7 +5047,7 @@
                           <a:ea typeface="Calibri" pitchFamily="34" charset="-122"/>
                           <a:cs typeface="Calibri" pitchFamily="34" charset="-120"/>
                         </a:rPr>
-                        <a:t>0.3183 / 9.134 / 3.589</a:t>
+                        <a:t>0.3103 / 8.563 / 3.347</a:t>
                       </a:r>
                       <a:endParaRPr lang="en-US" sz="1150" dirty="0">
                         <a:latin typeface="Calibri" charset="0"/>
@@ -5244,7 +5244,7 @@
                           <a:ea typeface="Calibri" pitchFamily="34" charset="-122"/>
                           <a:cs typeface="Calibri" pitchFamily="34" charset="-120"/>
                         </a:rPr>
-                        <a:t>₩203.09 from the passing run · spend ≈ budget</a:t>
+                        <a:t>₩409.87 from the passing run · spend ≈ budget</a:t>
                       </a:r>
                       <a:endParaRPr lang="en-US" sz="1150" dirty="0">
                         <a:latin typeface="Calibri" charset="0"/>
@@ -5441,7 +5441,7 @@
                           <a:ea typeface="Calibri" pitchFamily="34" charset="-122"/>
                           <a:cs typeface="Calibri" pitchFamily="34" charset="-120"/>
                         </a:rPr>
-                        <a:t>0.002383</a:t>
+                        <a:t>0.000875</a:t>
                       </a:r>
                       <a:endParaRPr lang="en-US" sz="1150" dirty="0">
                         <a:latin typeface="Calibri" charset="0"/>
@@ -5638,7 +5638,7 @@
                           <a:ea typeface="Calibri" pitchFamily="34" charset="-122"/>
                           <a:cs typeface="Calibri" pitchFamily="34" charset="-120"/>
                         </a:rPr>
-                        <a:t>fallback −1.0 ± 0.6 (14/16) · MEAT brackets cleanly</a:t>
+                        <a:t>fallback −1.0 ± 0.6 for ALL 16 · no category brackets cleanly</a:t>
                       </a:r>
                       <a:endParaRPr lang="en-US" sz="1150" dirty="0">
                         <a:latin typeface="Calibri" charset="0"/>
@@ -5835,7 +5835,7 @@
                           <a:ea typeface="Calibri" pitchFamily="34" charset="-122"/>
                           <a:cs typeface="Calibri" pitchFamily="34" charset="-120"/>
                         </a:rPr>
-                        <a:t>like-for-like DP vs legacy: −12.0% IL, −3.25pp clearance</a:t>
+                        <a:t>like-for-like DP vs legacy: −38.0% IL, −0.97pp clearance</a:t>
                       </a:r>
                       <a:endParaRPr lang="en-US" sz="1150" dirty="0">
                         <a:latin typeface="Calibri" charset="0"/>
@@ -6578,7 +6578,7 @@
                 <a:ea typeface="Calibri" pitchFamily="34" charset="-122"/>
                 <a:cs typeface="Calibri" pitchFamily="34" charset="-120"/>
               </a:rPr>
-              <a:t>Full decision path live, no prices applied — completeness 1.0000, zero cost-floor violations, mean discount 0.306 vs legacy 0.304</a:t>
+              <a:t>Full decision path live, no prices applied — 12,771 decisions, completeness 0.9974, zero cost-floor violations, drift 1.0225</a:t>
             </a:r>
             <a:endParaRPr lang="en-US" sz="1100" dirty="0"/>
           </a:p>
@@ -7491,7 +7491,7 @@
                 <a:ea typeface="Calibri" pitchFamily="34" charset="-122"/>
                 <a:cs typeface="Calibri" pitchFamily="34" charset="-120"/>
               </a:rPr>
-              <a:t>Per-outcome information is small and deflated ÷ 3.589; the prior is wide for 14/16 categories. Deepening only pays once |ε| clears ~1.7–1.9, so the posterior must TRAVEL, not merely converge.</a:t>
+              <a:t>Per-outcome information is small and deflated ÷ 3.347; the prior is wide for ALL 16 categories now that no bracket is accepted. Deepening only pays once |ε| clears a measured median of 2.429, so the posterior must TRAVEL, not merely converge.</a:t>
             </a:r>
             <a:endParaRPr lang="en-US" sz="1050" dirty="0"/>
           </a:p>
@@ -8265,7 +8265,7 @@
                 <a:ea typeface="Calibri" pitchFamily="34" charset="-122"/>
                 <a:cs typeface="Calibri" pitchFamily="34" charset="-120"/>
               </a:rPr>
-              <a:t>Measured on real 2-week blocks of history: 5.54% detectable, so 7.5% has headroom and 5% is within reach. This overturns the earlier ≈5-week arithmetic. Rows beyond 6 weeks rest on 1–2 blocks and are noise — read the 2–4 week rows only.</a:t>
+              <a:t>Measured on real 2-week blocks: 3.05% detectable, so 7.5% has wide headroom. Counting scrap properly made IL a more stable quantity — clustered SE 0.002383 → 0.000875 — and power stopped being a constraint. Read the 2–4 week rows; beyond 6 weeks the block count collapses to 1–3.</a:t>
             </a:r>
             <a:endParaRPr lang="en-US" sz="1050" dirty="0"/>
           </a:p>
@@ -8411,7 +8411,7 @@
                 <a:ea typeface="Calibri" pitchFamily="34" charset="-122"/>
                 <a:cs typeface="Calibri" pitchFamily="34" charset="-120"/>
               </a:rPr>
-              <a:t>A healthy system spending 1% of IL cannot move scrap near 20%; the failure it guards against breached the equivalent 5–10× in replay. Robust 3σ noise floor is 18.9%, so 20% clears it by only ~6% — the persistence rule is what makes that safe.</a:t>
+              <a:t>The DAILY basis has no usable threshold: 3σ noise is 480% raw / 153% robust, outlier-dominated — the series swings more than its own level. Set this against the CONTROL-ARM basis the monitor actually uses in the A/B, now measured separately; before the A/B, review scrap level in the pilot readout rather than auto-triggering.</a:t>
             </a:r>
             <a:endParaRPr lang="en-US" sz="1050" dirty="0"/>
           </a:p>
@@ -8557,7 +8557,7 @@
                 <a:ea typeface="Calibri" pitchFamily="34" charset="-122"/>
                 <a:cs typeface="Calibri" pitchFamily="34" charset="-120"/>
               </a:rPr>
-              <a:t>Markdown margins are thin: measured 3σ floor is 13.6%, so anything at or under ~13.5% fires on ordinary days. Both thresholds now sit close to their floors, which makes the 2-day persistence rule load-bearing — it is implemented and tested, not an aspiration. Guardrails suspend exploration only; pricing continues.</a:t>
+              <a:t>This series is well behaved: 3σ floor 13.63%, robust 14.94%, not outlier-dominated. 15% clears the raw floor by ~10% and sits just under the robust one, so the 2-day persistence rule covers the gap — implemented and tested, not an aspiration. Guardrails suspend exploration only; pricing continues.</a:t>
             </a:r>
             <a:endParaRPr lang="en-US" sz="1050" dirty="0"/>
           </a:p>
@@ -9377,7 +9377,7 @@
                 <a:ea typeface="Cambria" pitchFamily="34" charset="-122"/>
                 <a:cs typeface="Cambria" pitchFamily="34" charset="-120"/>
               </a:rPr>
-              <a:t>35.6%</a:t>
+              <a:t>32.3%</a:t>
             </a:r>
             <a:endParaRPr lang="en-US" sz="3400" dirty="0"/>
           </a:p>
@@ -9484,7 +9484,7 @@
                 <a:ea typeface="Cambria" pitchFamily="34" charset="-122"/>
                 <a:cs typeface="Cambria" pitchFamily="34" charset="-120"/>
               </a:rPr>
-              <a:t>91%</a:t>
+              <a:t>93%</a:t>
             </a:r>
             <a:endParaRPr lang="en-US" sz="3400" dirty="0"/>
           </a:p>
@@ -9591,7 +9591,7 @@
                 <a:ea typeface="Cambria" pitchFamily="34" charset="-122"/>
                 <a:cs typeface="Cambria" pitchFamily="34" charset="-120"/>
               </a:rPr>
-              <a:t>78%</a:t>
+              <a:t>76%</a:t>
             </a:r>
             <a:endParaRPr lang="en-US" sz="3400" dirty="0"/>
           </a:p>
@@ -15274,7 +15274,7 @@
                 <a:ea typeface="Calibri" pitchFamily="34" charset="-122"/>
                 <a:cs typeface="Calibri" pitchFamily="34" charset="-120"/>
               </a:rPr>
-              <a:t>Evidence ÷ deff = 3.589</a:t>
+              <a:t>Evidence ÷ deff = 3.347</a:t>
             </a:r>
             <a:endParaRPr lang="en-US" sz="1100" dirty="0"/>
           </a:p>
@@ -16867,7 +16867,7 @@
                 <a:ea typeface="Cambria" pitchFamily="34" charset="-122"/>
                 <a:cs typeface="Cambria" pitchFamily="34" charset="-120"/>
               </a:rPr>
-              <a:t>₩203.09</a:t>
+              <a:t>₩409.87</a:t>
             </a:r>
             <a:endParaRPr lang="en-US" sz="3800" dirty="0"/>
           </a:p>
@@ -16906,7 +16906,7 @@
                 <a:ea typeface="Calibri" pitchFamily="34" charset="-122"/>
                 <a:cs typeface="Calibri" pitchFamily="34" charset="-120"/>
               </a:rPr>
-              <a:t>starting threshold τ (22.7th percentile of the Q-value spread), self-calibrating daily</a:t>
+              <a:t>starting threshold τ (11.4th percentile of the Q-value spread), self-calibrating daily</a:t>
             </a:r>
             <a:endParaRPr lang="en-US" sz="1100" dirty="0"/>
           </a:p>

--- a/docs/perishable_markdown_tech_deck.pptx
+++ b/docs/perishable_markdown_tech_deck.pptx
@@ -31014,7 +31014,7 @@
                 <a:ea typeface="Cambria" pitchFamily="34" charset="-122"/>
                 <a:cs typeface="Cambria" pitchFamily="34" charset="-120"/>
               </a:rPr>
-              <a:t>Not every ending is an ending</a:t>
+              <a:t>The counter is not the ending</a:t>
             </a:r>
             <a:endParaRPr lang="en-US" sz="1500" dirty="0"/>
           </a:p>
@@ -31053,7 +31053,7 @@
                 <a:ea typeface="Calibri" pitchFamily="34" charset="-122"/>
                 <a:cs typeface="Calibri" pitchFamily="34" charset="-120"/>
               </a:rPr>
-              <a:t>An episode can stop because it sold out, because the window expired, or because our extract ran out. Only the middle case scraps. The third has an unknown leftover and is recorded as missing rather than zero — inventing a number there would bias both the baseline and the guardrail noise floors that stop-thresholds are set from.</a:t>
+              <a:t>flc_window is a nominal countdown, still positive on ~99.9% of final rows. Keying scrap to “counter reached zero” classified the 13% of episodes that end holding stock as unknown and dropped ~99% of real leftover from every scrap statistic. What ends an episode is the listing ending; only the extract edge is genuinely unknown.</a:t>
             </a:r>
             <a:endParaRPr lang="en-US" sz="1150" dirty="0"/>
           </a:p>
@@ -31326,7 +31326,7 @@
                 <a:ea typeface="Calibri" pitchFamily="34" charset="-122"/>
                 <a:cs typeface="Calibri" pitchFamily="34" charset="-120"/>
               </a:rPr>
-              <a:t>Then economics — windows longer than 48 hours (a known source defect, not a long window), prices below cost on the offered basis, non-priceable rows, sales exceeding inventory.</a:t>
+              <a:t>Then economics — windows longer than 120 hours (a known source defect, not a long window), prices below cost on the offered basis, non-priceable rows, sales exceeding inventory.</a:t>
             </a:r>
             <a:endParaRPr lang="en-US" sz="1400" dirty="0"/>
           </a:p>
@@ -31543,7 +31543,7 @@
                 <a:ea typeface="Cambria" pitchFamily="34" charset="-122"/>
                 <a:cs typeface="Cambria" pitchFamily="34" charset="-120"/>
               </a:rPr>
-              <a:t>48 h</a:t>
+              <a:t>120 h</a:t>
             </a:r>
             <a:endParaRPr lang="en-US" sz="3400" dirty="0"/>
           </a:p>
@@ -31582,7 +31582,7 @@
                 <a:ea typeface="Calibri" pitchFamily="34" charset="-122"/>
                 <a:cs typeface="Calibri" pitchFamily="34" charset="-120"/>
               </a:rPr>
-              <a:t>hard cap on the clearance window — larger values are data defects</a:t>
+              <a:t>cap on the clearance window — raised from 48h, which was cutting real multi-day windows</a:t>
             </a:r>
             <a:endParaRPr lang="en-US" sz="1050" dirty="0"/>
           </a:p>
@@ -32052,7 +32052,7 @@
                 <a:ea typeface="Cambria" pitchFamily="34" charset="-122"/>
                 <a:cs typeface="Cambria" pitchFamily="34" charset="-120"/>
               </a:rPr>
-              <a:t>Window completed</a:t>
+              <a:t>Listing ended with stock</a:t>
             </a:r>
             <a:endParaRPr lang="en-US" sz="1450" dirty="0"/>
           </a:p>
@@ -32130,7 +32130,7 @@
                 <a:ea typeface="Calibri" pitchFamily="34" charset="-122"/>
                 <a:cs typeface="Calibri" pitchFamily="34" charset="-120"/>
               </a:rPr>
-              <a:t>The counter reached zero with stock still on hand. This is the only ending that scraps, and the leftover is computed rather than read: max(0, starting inventory − units sold) on the final row.</a:t>
+              <a:t>The listing ended holding stock, so those units were disposed of. This is where essentially all scrap lives. Leftover is computed rather than read: max(0, starting inventory − units sold) on the final row.</a:t>
             </a:r>
             <a:endParaRPr lang="en-US" sz="1050" dirty="0"/>
           </a:p>
@@ -32276,7 +32276,7 @@
                 <a:ea typeface="Calibri" pitchFamily="34" charset="-122"/>
                 <a:cs typeface="Calibri" pitchFamily="34" charset="-120"/>
               </a:rPr>
-              <a:t>Inventory hit zero before the window did. A genuine zero — and the reason the planner's horizon must come from the window rather than the row count, since these episodes have fewer rows precisely because they succeeded.</a:t>
+              <a:t>Inventory hit zero. A genuine zero — and the reason the planner's horizon must come from the window rather than the row count, since these episodes have fewer rows precisely because they succeeded.</a:t>
             </a:r>
             <a:endParaRPr lang="en-US" sz="1050" dirty="0"/>
           </a:p>
@@ -32344,7 +32344,7 @@
                 <a:ea typeface="Cambria" pitchFamily="34" charset="-122"/>
                 <a:cs typeface="Cambria" pitchFamily="34" charset="-120"/>
               </a:rPr>
-              <a:t>Truncated by the extract</a:t>
+              <a:t>Cut at the extract edge</a:t>
             </a:r>
             <a:endParaRPr lang="en-US" sz="1450" dirty="0"/>
           </a:p>
@@ -32422,7 +32422,7 @@
                 <a:ea typeface="Calibri" pitchFamily="34" charset="-122"/>
                 <a:cs typeface="Calibri" pitchFamily="34" charset="-120"/>
               </a:rPr>
-              <a:t>Our data ended before the window did. Recorded as missing, never as zero. Charging these to scrap overstates the baseline the policy is measured against; ignoring the distinction overstates performance. They are excluded from every scrap-bearing statistic.</a:t>
+              <a:t>The last row sits at the final hour of the extract, so the episode may have been cut rather than ended. Recorded as missing, never as zero — and now a sliver of the population rather than most of it.</a:t>
             </a:r>
             <a:endParaRPr lang="en-US" sz="1050" dirty="0"/>
           </a:p>
@@ -32504,7 +32504,7 @@
                 <a:ea typeface="Calibri" pitchFamily="34" charset="-122"/>
                 <a:cs typeface="Calibri" pitchFamily="34" charset="-120"/>
               </a:rPr>
-              <a:t>replay, monitoring and threshold derivation all call the same scrap function. Three places computing it independently is how the write-off quirk stayed hidden as long as it did.</a:t>
+              <a:t>the end signal is the listing ending, NOT the counter reaching zero — that fires on ~0.1% of episodes and keying scrap to it excluded ~99% of real leftover. Replay, monitoring and threshold derivation all call one function.</a:t>
             </a:r>
             <a:endParaRPr lang="en-US" sz="1250" dirty="0"/>
           </a:p>

--- a/docs/perishable_markdown_tech_deck.pptx
+++ b/docs/perishable_markdown_tech_deck.pptx
@@ -31053,7 +31053,7 @@
                 <a:ea typeface="Calibri" pitchFamily="34" charset="-122"/>
                 <a:cs typeface="Calibri" pitchFamily="34" charset="-120"/>
               </a:rPr>
-              <a:t>flc_window is a nominal countdown, still positive on ~99.9% of final rows. Keying scrap to “counter reached zero” classified the 13% of episodes that end holding stock as unknown and dropped ~99% of real leftover from every scrap statistic. What ends an episode is the listing ending; only the extract edge is genuinely unknown.</a:t>
+              <a:t>flc_window is a nominal countdown, still positive on ~99.9% of final rows. Keying scrap to “counter reached zero” classified the 13% of episodes that end holding stock as unknown and dropped ~99% of real leftover from every scrap statistic. Closure is marked by the source itself — the zeroed ending_inventory — so we read that instead.</a:t>
             </a:r>
             <a:endParaRPr lang="en-US" sz="1150" dirty="0"/>
           </a:p>
@@ -32130,7 +32130,7 @@
                 <a:ea typeface="Calibri" pitchFamily="34" charset="-122"/>
                 <a:cs typeface="Calibri" pitchFamily="34" charset="-120"/>
               </a:rPr>
-              <a:t>The listing ended holding stock, so those units were disposed of. This is where essentially all scrap lives. Leftover is computed rather than read: max(0, starting inventory − units sold) on the final row.</a:t>
+              <a:t>The source zeroed ending_inventory with stock still on hand — its own signal that the listing closed — so those units were disposed of. Leftover is computed, never read: max(0, starting inventory − units sold).</a:t>
             </a:r>
             <a:endParaRPr lang="en-US" sz="1050" dirty="0"/>
           </a:p>
@@ -32344,7 +32344,7 @@
                 <a:ea typeface="Cambria" pitchFamily="34" charset="-122"/>
                 <a:cs typeface="Cambria" pitchFamily="34" charset="-120"/>
               </a:rPr>
-              <a:t>Cut at the extract edge</a:t>
+              <a:t>No closure sentinel</a:t>
             </a:r>
             <a:endParaRPr lang="en-US" sz="1450" dirty="0"/>
           </a:p>
@@ -32422,7 +32422,7 @@
                 <a:ea typeface="Calibri" pitchFamily="34" charset="-122"/>
                 <a:cs typeface="Calibri" pitchFamily="34" charset="-120"/>
               </a:rPr>
-              <a:t>The last row sits at the final hour of the extract, so the episode may have been cut rather than ended. Recorded as missing, never as zero — and now a sliver of the population rather than most of it.</a:t>
+              <a:t>The final row still reports honest inventory, so the listing has not closed: the episode is open, or the feed cut it. Recorded as missing, never as zero. On a closed extract this is empty; live, it is the episodes still running.</a:t>
             </a:r>
             <a:endParaRPr lang="en-US" sz="1050" dirty="0"/>
           </a:p>
@@ -32504,7 +32504,7 @@
                 <a:ea typeface="Calibri" pitchFamily="34" charset="-122"/>
                 <a:cs typeface="Calibri" pitchFamily="34" charset="-120"/>
               </a:rPr>
-              <a:t>the end signal is the listing ending, NOT the counter reaching zero — that fires on ~0.1% of episodes and keying scrap to it excluded ~99% of real leftover. Replay, monitoring and threshold derivation all call one function.</a:t>
+              <a:t>closure is the source's zeroed ending_inventory, NOT the counter reaching zero — that fires on ~0.1% of episodes, and keying scrap to it excluded ~99% of real leftover. Replay, monitoring and threshold derivation all call one function.</a:t>
             </a:r>
             <a:endParaRPr lang="en-US" sz="1250" dirty="0"/>
           </a:p>

--- a/docs/perishable_markdown_tech_deck.pptx
+++ b/docs/perishable_markdown_tech_deck.pptx
@@ -31014,7 +31014,7 @@
                 <a:ea typeface="Cambria" pitchFamily="34" charset="-122"/>
                 <a:cs typeface="Cambria" pitchFamily="34" charset="-120"/>
               </a:rPr>
-              <a:t>The counter is not the ending</a:t>
+              <a:t>Scrap is the leftover, nothing else</a:t>
             </a:r>
             <a:endParaRPr lang="en-US" sz="1500" dirty="0"/>
           </a:p>
@@ -31053,7 +31053,7 @@
                 <a:ea typeface="Calibri" pitchFamily="34" charset="-122"/>
                 <a:cs typeface="Calibri" pitchFamily="34" charset="-120"/>
               </a:rPr>
-              <a:t>flc_window is a nominal countdown, still positive on ~99.9% of final rows. Keying scrap to “counter reached zero” classified the 13% of episodes that end holding stock as unknown and dropped ~99% of real leftover from every scrap statistic. Closure is marked by the source itself — the zeroed ending_inventory — so we read that instead.</a:t>
+              <a:t>Scrap is max(0, inventory − sold) on the last row: zero if it sold out, the leftover if it ended holding stock. Not the counter — flc_window is nominal and still positive on ~99.9% of final rows, and keying scrap to it pushed ~99% of real leftover into an unknown bucket. Not the reported ending_inventory either, which is zeroed on every final row.</a:t>
             </a:r>
             <a:endParaRPr lang="en-US" sz="1150" dirty="0"/>
           </a:p>
@@ -31984,7 +31984,7 @@
                 <a:ea typeface="Cambria" pitchFamily="34" charset="-122"/>
                 <a:cs typeface="Cambria" pitchFamily="34" charset="-120"/>
               </a:rPr>
-              <a:t>Three ways an episode ends — three different scrap facts</a:t>
+              <a:t>Two endings, and one state that is not an ending</a:t>
             </a:r>
             <a:endParaRPr lang="en-US" sz="2900" dirty="0"/>
           </a:p>
@@ -32052,7 +32052,7 @@
                 <a:ea typeface="Cambria" pitchFamily="34" charset="-122"/>
                 <a:cs typeface="Cambria" pitchFamily="34" charset="-120"/>
               </a:rPr>
-              <a:t>Listing ended with stock</a:t>
+              <a:t>Ended holding stock</a:t>
             </a:r>
             <a:endParaRPr lang="en-US" sz="1450" dirty="0"/>
           </a:p>
@@ -32130,7 +32130,7 @@
                 <a:ea typeface="Calibri" pitchFamily="34" charset="-122"/>
                 <a:cs typeface="Calibri" pitchFamily="34" charset="-120"/>
               </a:rPr>
-              <a:t>The source zeroed ending_inventory with stock still on hand — its own signal that the listing closed — so those units were disposed of. Leftover is computed, never read: max(0, starting inventory − units sold).</a:t>
+              <a:t>Those units were disposed of. Leftover is computed, never read: max(0, starting inventory − units sold) on the last row. 13.55% of episodes, and this is where all scrap lives.</a:t>
             </a:r>
             <a:endParaRPr lang="en-US" sz="1050" dirty="0"/>
           </a:p>
@@ -32198,7 +32198,7 @@
                 <a:ea typeface="Cambria" pitchFamily="34" charset="-122"/>
                 <a:cs typeface="Cambria" pitchFamily="34" charset="-120"/>
               </a:rPr>
-              <a:t>Sold out early</a:t>
+              <a:t>Sold out</a:t>
             </a:r>
             <a:endParaRPr lang="en-US" sz="1450" dirty="0"/>
           </a:p>
@@ -32276,7 +32276,7 @@
                 <a:ea typeface="Calibri" pitchFamily="34" charset="-122"/>
                 <a:cs typeface="Calibri" pitchFamily="34" charset="-120"/>
               </a:rPr>
-              <a:t>Inventory hit zero. A genuine zero — and the reason the planner's horizon must come from the window rather than the row count, since these episodes have fewer rows precisely because they succeeded.</a:t>
+              <a:t>Leftover is zero, so there is nothing to scrap — a fact, not an assumption. 86.45% of episodes. These also have fewer rows precisely because they succeeded, which is why the planner's horizon comes from the window, not the row count.</a:t>
             </a:r>
             <a:endParaRPr lang="en-US" sz="1050" dirty="0"/>
           </a:p>
@@ -32344,7 +32344,7 @@
                 <a:ea typeface="Cambria" pitchFamily="34" charset="-122"/>
                 <a:cs typeface="Cambria" pitchFamily="34" charset="-120"/>
               </a:rPr>
-              <a:t>No closure sentinel</a:t>
+              <a:t>Not an ending</a:t>
             </a:r>
             <a:endParaRPr lang="en-US" sz="1450" dirty="0"/>
           </a:p>
@@ -32383,7 +32383,7 @@
                 <a:ea typeface="Cambria" pitchFamily="34" charset="-122"/>
                 <a:cs typeface="Cambria" pitchFamily="34" charset="-120"/>
               </a:rPr>
-              <a:t>scrap = unknown</a:t>
+              <a:t>not finished yet</a:t>
             </a:r>
             <a:endParaRPr lang="en-US" sz="1900" dirty="0"/>
           </a:p>
@@ -32422,7 +32422,7 @@
                 <a:ea typeface="Calibri" pitchFamily="34" charset="-122"/>
                 <a:cs typeface="Calibri" pitchFamily="34" charset="-120"/>
               </a:rPr>
-              <a:t>The final row still reports honest inventory, so the listing has not closed: the episode is open, or the feed cut it. Recorded as missing, never as zero. On a closed extract this is empty; live, it is the episodes still running.</a:t>
+              <a:t>Empty offline — every episode in the extract has finished. Live, it is the episodes still in flight: their leftover is stock on the shelf, not scrap in the bin. Recorded as unknown, never as zero, so it is not booked twice.</a:t>
             </a:r>
             <a:endParaRPr lang="en-US" sz="1050" dirty="0"/>
           </a:p>
@@ -32490,7 +32490,7 @@
                 <a:ea typeface="Calibri" pitchFamily="34" charset="-122"/>
                 <a:cs typeface="Calibri" pitchFamily="34" charset="-120"/>
               </a:rPr>
-              <a:t>One definition, one place:  </a:t>
+              <a:t>Two lines of logic:  </a:t>
             </a:r>
             <a:pPr indent="0" marL="0">
               <a:buNone/>
@@ -32504,7 +32504,7 @@
                 <a:ea typeface="Calibri" pitchFamily="34" charset="-122"/>
                 <a:cs typeface="Calibri" pitchFamily="34" charset="-120"/>
               </a:rPr>
-              <a:t>closure is the source's zeroed ending_inventory, NOT the counter reaching zero — that fires on ~0.1% of episodes, and keying scrap to it excluded ~99% of real leftover. Replay, monitoring and threshold derivation all call one function.</a:t>
+              <a:t>scrap is the leftover on the last row, and nothing else. NOT the counter reaching zero — that fires on ~0.1% of episodes and keying scrap to it excluded ~99% of real leftover. NOT the reported ending_inventory, which is zeroed on every final row.</a:t>
             </a:r>
             <a:endParaRPr lang="en-US" sz="1250" dirty="0"/>
           </a:p>

--- a/docs/perishable_markdown_tech_deck.pptx
+++ b/docs/perishable_markdown_tech_deck.pptx
@@ -13751,7 +13751,7 @@
                 <a:ea typeface="Cambria" pitchFamily="34" charset="-122"/>
                 <a:cs typeface="Cambria" pitchFamily="34" charset="-120"/>
               </a:rPr>
-              <a:t>₩409.87</a:t>
+              <a:t>₩447.78</a:t>
             </a:r>
             <a:endParaRPr lang="en-US" sz="3800" dirty="0"/>
           </a:p>
@@ -13790,7 +13790,7 @@
                 <a:ea typeface="Calibri" pitchFamily="34" charset="-122"/>
                 <a:cs typeface="Calibri" pitchFamily="34" charset="-120"/>
               </a:rPr>
-              <a:t>starting threshold τ (11.4th percentile of the Q-value spread), self-calibrating daily</a:t>
+              <a:t>starting threshold τ, derived from the gate-passing backtest and self-calibrating daily</a:t>
             </a:r>
             <a:endParaRPr lang="en-US" sz="1100" dirty="0"/>
           </a:p>
@@ -14321,7 +14321,7 @@
                 <a:ea typeface="Cambria" pitchFamily="34" charset="-122"/>
                 <a:cs typeface="Cambria" pitchFamily="34" charset="-120"/>
               </a:rPr>
-              <a:t>11.4th</a:t>
+              <a:t>₩447.78</a:t>
             </a:r>
             <a:endParaRPr lang="en-US" sz="3800" dirty="0"/>
           </a:p>
@@ -14360,7 +14360,7 @@
                 <a:ea typeface="Calibri" pitchFamily="34" charset="-122"/>
                 <a:cs typeface="Calibri" pitchFamily="34" charset="-120"/>
               </a:rPr>
-              <a:t>percentile of the Q-spread distribution where τ lands — the cheapest tenth of all available experiments</a:t>
+              <a:t>the derived starting threshold — the Q-spread quantile whose implied daily spend matches the 1%-of-IL budget</a:t>
             </a:r>
             <a:endParaRPr lang="en-US" sz="1100" dirty="0"/>
           </a:p>
@@ -20551,7 +20551,7 @@
                 <a:ea typeface="Calibri" pitchFamily="34" charset="-122"/>
                 <a:cs typeface="Calibri" pitchFamily="34" charset="-120"/>
               </a:rPr>
-              <a:t>√T predicts that twelve weeks buys 2.4× the precision of two. Measured, it buys 1.6×. Clusters persist across time, so the effective sample grows far more slowly than the row count does.</a:t>
+              <a:t>Duration buys almost nothing. √T says six weeks should reach 3.90% against two weeks' 6.75%; measured it reaches 5.74% — 15% better for three times the calendar. Variance is dominated by spread between the 71,559 SKU × FC units, and extra weeks add correlated observations of the same units, not new ones.</a:t>
             </a:r>
             <a:endParaRPr lang="en-US" sz="1200" dirty="0"/>
           </a:p>
@@ -20572,7 +20572,7 @@
                 <a:ea typeface="Calibri" pitchFamily="34" charset="-122"/>
                 <a:cs typeface="Calibri" pitchFamily="34" charset="-120"/>
               </a:rPr>
-              <a:t>The conclusion is to run two weeks and accept roughly 3% resolution against a measured 38% effect, rather than spend six weeks buying precision the decision does not need.</a:t>
+              <a:t>Past six weeks the block count falls to 1–3 and those rows are noise — eight weeks measures WORSE than two. Two weeks it is: 6.75% against a measured 38% effect, a 5.6× margin.</a:t>
             </a:r>
             <a:endParaRPr lang="en-US" sz="1200" dirty="0"/>
           </a:p>
@@ -20611,7 +20611,7 @@
                 <a:ea typeface="Cambria" pitchFamily="34" charset="-122"/>
                 <a:cs typeface="Cambria" pitchFamily="34" charset="-120"/>
               </a:rPr>
-              <a:t>0.000875</a:t>
+              <a:t>0.002915</a:t>
             </a:r>
             <a:endParaRPr lang="en-US" sz="3800" dirty="0"/>
           </a:p>
@@ -20650,7 +20650,7 @@
                 <a:ea typeface="Calibri" pitchFamily="34" charset="-122"/>
                 <a:cs typeface="Calibri" pitchFamily="34" charset="-120"/>
               </a:rPr>
-              <a:t>clustered standard error of the IL% ratio estimator over the full window</a:t>
+              <a:t>clustered standard error of the IL% ratio estimator over the full window, on SKU × FC</a:t>
             </a:r>
             <a:endParaRPr lang="en-US" sz="1100" dirty="0"/>
           </a:p>
@@ -20689,7 +20689,7 @@
                 <a:ea typeface="Cambria" pitchFamily="34" charset="-122"/>
                 <a:cs typeface="Cambria" pitchFamily="34" charset="-120"/>
               </a:rPr>
-              <a:t>3.05%</a:t>
+              <a:t>6.75%</a:t>
             </a:r>
             <a:endParaRPr lang="en-US" sz="3800" dirty="0"/>
           </a:p>
@@ -20728,7 +20728,7 @@
                 <a:ea typeface="Calibri" pitchFamily="34" charset="-122"/>
                 <a:cs typeface="Calibri" pitchFamily="34" charset="-120"/>
               </a:rPr>
-              <a:t>relative effect detectable in two weeks, measured on nine real blocks</a:t>
+              <a:t>detectable in two weeks, on nine measured blocks — the only well-sampled row</a:t>
             </a:r>
             <a:endParaRPr lang="en-US" sz="1100" dirty="0"/>
           </a:p>
@@ -20767,7 +20767,7 @@
                 <a:ea typeface="Cambria" pitchFamily="34" charset="-122"/>
                 <a:cs typeface="Cambria" pitchFamily="34" charset="-120"/>
               </a:rPr>
-              <a:t>1.89%</a:t>
+              <a:t>5.74%</a:t>
             </a:r>
             <a:endParaRPr lang="en-US" sz="3200" dirty="0"/>
           </a:p>
@@ -20806,7 +20806,7 @@
                 <a:ea typeface="Calibri" pitchFamily="34" charset="-122"/>
                 <a:cs typeface="Calibri" pitchFamily="34" charset="-120"/>
               </a:rPr>
-              <a:t>detectable in twelve weeks — the √T extrapolation promised 1.25%</a:t>
+              <a:t>the best any duration reaches (six weeks, three blocks) — √T promised 3.90%</a:t>
             </a:r>
             <a:endParaRPr lang="en-US" sz="1100" dirty="0"/>
           </a:p>
@@ -27782,7 +27782,7 @@
                 <a:ea typeface="Cambria" pitchFamily="34" charset="-122"/>
                 <a:cs typeface="Cambria" pitchFamily="34" charset="-120"/>
               </a:rPr>
-              <a:t>3 · A/B power</a:t>
+              <a:t>3 · A/B power — duration is not the lever</a:t>
             </a:r>
             <a:endParaRPr lang="en-US" sz="1350" dirty="0"/>
           </a:p>
@@ -27835,7 +27835,7 @@
                 <a:ea typeface="Calibri" pitchFamily="34" charset="-122"/>
                 <a:cs typeface="Calibri" pitchFamily="34" charset="-120"/>
               </a:rPr>
-              <a:t>Measured variance is 6× the original assumption; small effects may not fit the window.</a:t>
+              <a:t>Clustered SE 0.002915 once scrap is counted in full; 6.75% detectable at 2 weeks against a measured 38% effect — a 5.6× margin. The duration curve is nearly flat: 6 weeks reaches only 5.74% where √T promised 3.90%.</a:t>
             </a:r>
             <a:endParaRPr lang="en-US" sz="1050" dirty="0"/>
           </a:p>
@@ -27888,7 +27888,7 @@
                 <a:ea typeface="Calibri" pitchFamily="34" charset="-122"/>
                 <a:cs typeface="Calibri" pitchFamily="34" charset="-120"/>
               </a:rPr>
-              <a:t>Empirical duration-vs-effect table from the derivation tool; the owner commits to a feasible pair before launch. No early reads.</a:t>
+              <a:t>Empirical duration-vs-effect table from the derivation tool; the owner commits to a feasible pair before launch. No early reads. If more power is ever needed the lever is more SKU × FC units, not more weeks.</a:t>
             </a:r>
             <a:endParaRPr lang="en-US" sz="1050" dirty="0"/>
           </a:p>
@@ -27927,7 +27927,7 @@
                 <a:ea typeface="Calibri" pitchFamily="34" charset="-122"/>
                 <a:cs typeface="Calibri" pitchFamily="34" charset="-120"/>
               </a:rPr>
-              <a:t>Also tracked: day-one behaviour is enter-shallow-and-hold, so expect lower clearance and higher scrap until ε moves · metric divergence at readout (pre-committed rule) · single-elasticity misspecification · censored training labels (first phase-2 item).</a:t>
+              <a:t>Also tracked: day-one behaviour is enter-shallow-and-hold, so expect lower clearance and higher scrap until ε moves · metric divergence at readout (pre-committed rule) · single-elasticity misspecification · episode fragmentation from missing source hours (2.6% of episodes, 27k units of ambiguous scrap) · censored training labels.</a:t>
             </a:r>
             <a:endParaRPr lang="en-US" sz="1100" dirty="0"/>
           </a:p>
@@ -28261,7 +28261,7 @@
                 <a:ea typeface="Calibri" pitchFamily="34" charset="-122"/>
                 <a:cs typeface="Calibri" pitchFamily="34" charset="-120"/>
               </a:rPr>
-              <a:t>Measured on real 2-week blocks: 3.05% detectable, so 7.5% has wide headroom. Counting scrap properly made IL a more stable quantity — clustered SE 0.002383 → 0.000875 — and power stopped being a constraint. Read the 2–4 week rows; beyond 6 weeks the block count collapses to 1–3.</a:t>
+              <a:t>Measured on nine real 2-week blocks: 6.75% detectable, so 7.5% is met with 0.75pp to spare. Thin against the target — but the target is ours to choose and the measured policy effect is 38%, a 5.6× margin. Duration barely helps: six weeks only reaches 5.74% where √T promised 3.90%, and past six weeks the block count collapses to 1–3.</a:t>
             </a:r>
             <a:endParaRPr lang="en-US" sz="1050" dirty="0"/>
           </a:p>
@@ -28368,7 +28368,7 @@
                 <a:ea typeface="Cambria" pitchFamily="34" charset="-122"/>
                 <a:cs typeface="Cambria" pitchFamily="34" charset="-120"/>
               </a:rPr>
-              <a:t>20% relative vs control</a:t>
+              <a:t>50% relative vs control</a:t>
             </a:r>
             <a:endParaRPr lang="en-US" sz="1900" dirty="0"/>
           </a:p>
@@ -28407,7 +28407,7 @@
                 <a:ea typeface="Calibri" pitchFamily="34" charset="-122"/>
                 <a:cs typeface="Calibri" pitchFamily="34" charset="-120"/>
               </a:rPr>
-              <a:t>The DAILY basis has no usable threshold: 3σ noise is 480% raw / 153% robust, outlier-dominated — the series swings more than its own level. Set this against the CONTROL-ARM basis the monitor actually uses in the A/B, now measured separately; before the A/B, review scrap level in the pilot readout rather than auto-triggering.</a:t>
+              <a:t>Now a real guardrail. Once the floor was measured on the same smoothing AND the same population the monitor triggers on, it fell from an unusable 480% to a binding 39.6% (control-arm basis; trailing 38.9% raw, 40.1% robust, not outlier-dominated, mean scrap level 13.3%). 50% clears the floor by 26% and stays well inside the 3× line past which a guardrail cannot fire at all.</a:t>
             </a:r>
             <a:endParaRPr lang="en-US" sz="1050" dirty="0"/>
           </a:p>
@@ -28553,7 +28553,7 @@
                 <a:ea typeface="Calibri" pitchFamily="34" charset="-122"/>
                 <a:cs typeface="Calibri" pitchFamily="34" charset="-120"/>
               </a:rPr>
-              <a:t>This series is well behaved: 3σ floor 13.63%, robust 14.94%, not outlier-dominated. 15% clears the raw floor by ~10% and sits just under the robust one, so the 2-day persistence rule covers the gap — implemented and tested, not an aspiration. Guardrails suspend exploration only; pricing continues.</a:t>
+              <a:t>Well behaved throughout: binding 3σ floor 13.94% on the trailing basis, not outlier-dominated. 15% clears it by 7.6%, so the 2-day persistence rule is covering the gap rather than headroom — implemented and tested, not an aspiration. Guardrails suspend exploration only; pricing continues.</a:t>
             </a:r>
             <a:endParaRPr lang="en-US" sz="1050" dirty="0"/>
           </a:p>

--- a/docs/perishable_markdown_tech_deck.pptx
+++ b/docs/perishable_markdown_tech_deck.pptx
@@ -12965,7 +12965,7 @@
                 <a:ea typeface="Calibri" pitchFamily="34" charset="-122"/>
                 <a:cs typeface="Calibri" pitchFamily="34" charset="-120"/>
               </a:rPr>
-              <a:t>This is not a missing feature and not a bug — it is the correct answer at the launch prior. Widening the action set cannot change it. Only the posterior moving past the bar can.</a:t>
+              <a:t>This is not a missing feature and not a bug — it is the correct answer at the launch prior. Widening the action set cannot change it, and neither can a different prior: we re-ran the whole bootstrap at ε = −1.5 and the DP chose IDENTICAL prices (mean discount 0.1285 both, 0% deepened). Only the posterior crossing the bar can.</a:t>
             </a:r>
             <a:endParaRPr lang="en-US" sz="1200" dirty="0"/>
           </a:p>
@@ -12986,7 +12986,7 @@
                 <a:ea typeface="Calibri" pitchFamily="34" charset="-122"/>
                 <a:cs typeface="Calibri" pitchFamily="34" charset="-120"/>
               </a:rPr>
-              <a:t>The bar ignores censoring, which makes it optimistic: the true threshold is higher still. Expect enter-and-hold behaviour on day one, and brief the pilot on lower clearance and higher scrap.</a:t>
+              <a:t>The bar ignores censoring, which makes it optimistic — the true threshold is higher still. Expect enter-and-hold on day one, and brief the pilot on lower clearance and higher scrap. The −1.5 run also cost 26% on the learning rate (deff 3.347 → 4.204), so guessing a bigger ε buys nothing and slows the loop that would find the real one.</a:t>
             </a:r>
             <a:endParaRPr lang="en-US" sz="1200" dirty="0"/>
           </a:p>

--- a/docs/perishable_markdown_tech_deck.pptx
+++ b/docs/perishable_markdown_tech_deck.pptx
@@ -2485,10 +2485,8 @@
           <a:lstStyle/>
           <a:p>
             <a:r>
-              <a:rPr lang="en-US" dirty="0"/>
-              <a:t>This is the intellectual core of the talk. Confound 2 was NOT in the original analysis — we found it during bootstrap when every category's elasticity estimate pinned at the boundary. The fix (entry-hour identification) comes later. If the audience accepts this slide, the whole design follows.</a:t>
-            </a:r>
-            <a:endParaRPr lang="en-US" dirty="0"/>
+              <a:t>THE question this deck has to survive: 'you have five months of data, why don't you know the elasticity?' Answer it in three sentences. Every price in that data was set by a rule — it moved with the clock and with which items were already failing. So the data tells us what the rule did, not what customers do. Separating those needs prices chosen at random, which is what we budget 1% of inventory loss to buy. Lead with the reassuring half: history drives level, seasonality, hour shape and velocity, and all of it transfers — this is not a claim that our data is bad. Exactly one quantity fails, for a structural reason. And be ready for the natural follow-up, 'so collect more history first': it does not help. The bias is in how the data was generated, so it does not shrink with sample size. Ten years of the same ramp is ten years of the same confound.</a:t>
+            </a:r>
           </a:p>
         </p:txBody>
       </p:sp>
@@ -2923,10 +2921,8 @@
           <a:lstStyle/>
           <a:p>
             <a:r>
-              <a:rPr lang="en-US" dirty="0"/>
-              <a:t>This slide answers the inevitable question: why not calibrate elasticity on our own data? Answer: we did, in the most defensible form, and the estimates are unstable (30x swings on one spec choice), boundary-pinned, and direction-flipping across model versions — because the optimum tracks the confounds, not the customer. Worse, a fitted epsilon would make the backtest look great while teaching the planner exactly the wrong lesson. The learning pilot is the same fit run on clean randomized data, at a budgeted cost.</a:t>
-            </a:r>
-            <a:endParaRPr lang="en-US" dirty="0"/>
+              <a:t>This answers 'why not just fit it?' — we did, in its most defensible form, and the estimates swing 30x on a single modelling choice and pin at the search bound. The trap card is the one to dwell on: a fitted epsilon makes the REPLAY look excellent because the replay generates demand with the same epsilon it plans with. It is internally consistent with whatever number you feed it. That is also the answer if anyone proposes raising the prior until the system deepens — the replay would reward it, and the reward would be fictional. We tested -1.0 vs -1.5: identical prices, because both sit far below the 2.43 deepening bar.</a:t>
+            </a:r>
           </a:p>
         </p:txBody>
       </p:sp>
@@ -29199,7 +29195,7 @@
                 <a:ea typeface="Cambria" pitchFamily="34" charset="-122"/>
                 <a:cs typeface="Cambria" pitchFamily="34" charset="-120"/>
               </a:rPr>
-              <a:t>Our own history cannot tell us price elasticity</a:t>
+              <a:t>History predicts demand. It cannot identify price response.</a:t>
             </a:r>
             <a:endParaRPr lang="en-US" sz="2900" dirty="0"/>
           </a:p>
@@ -29632,7 +29628,7 @@
                 <a:ea typeface="Calibri" pitchFamily="34" charset="-122"/>
                 <a:cs typeface="Calibri" pitchFamily="34" charset="-120"/>
               </a:rPr>
-              <a:t>Consequence:  </a:t>
+              <a:t>Why history works for everything else:  </a:t>
             </a:r>
             <a:pPr indent="0" marL="0">
               <a:buNone/>
@@ -29646,7 +29642,7 @@
                 <a:ea typeface="Calibri" pitchFamily="34" charset="-122"/>
                 <a:cs typeface="Calibri" pitchFamily="34" charset="-120"/>
               </a:rPr>
-              <a:t>any system that claims to have learned price response from this data has actually learned the clock. History can bound elasticity; it cannot identify it.</a:t>
+              <a:t>the frozen model takes level, seasonality, hour shape and SKU velocity from history, and all of it transfers. Only the price SLOPE does not, because price was never varied independently of the clock or of which items were already failing. More history cannot fix that — ten years of the same ramp is ten years of the same confound. Only randomised prices can.</a:t>
             </a:r>
             <a:endParaRPr lang="en-US" sz="1500" dirty="0"/>
           </a:p>
@@ -29940,7 +29936,7 @@
                 <a:ea typeface="Calibri" pitchFamily="34" charset="-122"/>
                 <a:cs typeface="Calibri" pitchFamily="34" charset="-120"/>
               </a:rPr>
-              <a:t>The wide start deliberately holds the exploration budget at full scale — the first weeks of the learning pilot ARE the ε fit, on randomized data where the optimum means price response. Cost: capped at 1% of IL per day.</a:t>
+              <a:t>The wide start holds the exploration budget at full scale, and the first weeks of the pilot ARE the ε fit — on randomized data, where the optimum means price response. One day of randomised prices identifies ε better than five months of history, because it is the only data in which price was not set by a rule. Cost: capped at 1% of IL per day.</a:t>
             </a:r>
             <a:endParaRPr lang="en-US" sz="1250" dirty="0"/>
           </a:p>

--- a/docs/perishable_markdown_tech_deck.pptx
+++ b/docs/perishable_markdown_tech_deck.pptx
@@ -3007,10 +3007,8 @@
           <a:lstStyle/>
           <a:p>
             <a:r>
-              <a:rPr lang="en-US" dirty="0"/>
-              <a:t>Key message: the design splits the world into what history can estimate (levels, variance, correlation — second moments the confound doesn't poison) and the single quantity it can't (price response). Everything frozen is in service of attribution.</a:t>
-            </a:r>
-            <a:endParaRPr lang="en-US" dirty="0"/>
+              <a:t>Key message: the design splits the world into what history can estimate (levels, variance, correlation) and the single quantity it cannot (price response). Everything frozen is in service of attribution. If asked WHY CATEGORY AND NOT SUBCATEGORY, three answers in order of force: (1) a finer epsilon changes no price until a cell crosses the 2.43 deepening bar, and we measured that -- a -1.5 prior produced identical prices to -1.0; (2) evidence divides proportionally, so three subcategories each take ~3x the calendar to move, against a throughput that is already risk 1; (3) the bracket was rejected for all 16 categories, so every cell would start at the same -1.0 +/- 0.6 anyway -- dilution bought for nothing. It is deferred to phase 2, not dismissed, and the right form there is partial pooling (shrink each subcategory toward its category by its own precision), never a hard threshold ladder, which puts a cliff at the boundary.</a:t>
+            </a:r>
           </a:p>
         </p:txBody>
       </p:sp>
@@ -33198,7 +33196,7 @@
                 <a:ea typeface="Calibri" pitchFamily="34" charset="-122"/>
                 <a:cs typeface="Calibri" pitchFamily="34" charset="-120"/>
               </a:rPr>
-              <a:t>~10 learning cells (high-volume categories + one pooled cell) — fewer cells learn faster</a:t>
+              <a:t>~10 learning cells: high-volume categories plus one pooled cell. NOT subcategory — a finer ε changes no price until a cell crosses the deepening bar (2.43), and splitting cells divides the same evidence, so finer grain would only slow the one thing that gets us there</a:t>
             </a:r>
             <a:endParaRPr lang="en-US" sz="1250" dirty="0"/>
           </a:p>
